--- a/adv.data/mid/Lecture06_PLSQLFunction_Summer2024-2025.pptx
+++ b/adv.data/mid/Lecture06_PLSQLFunction_Summer2024-2025.pptx
@@ -199,30 +199,6 @@
 <file path=ppt/changesInfos/changesInfo1.xml><?xml version="1.0" encoding="utf-8"?>
 <pc:chgInfo xmlns:a="http://schemas.openxmlformats.org/drawingml/2006/main" xmlns:r="http://schemas.openxmlformats.org/officeDocument/2006/relationships" xmlns:ac="http://schemas.microsoft.com/office/drawing/2013/main/command" xmlns:pc="http://schemas.microsoft.com/office/powerpoint/2013/main/command">
   <pc:docChgLst>
-    <pc:chgData name="Juena Ahmed Noshin" userId="df4442bb-949b-4849-8a28-5716394ec665" providerId="ADAL" clId="{A48BF144-6D89-4B37-BF68-F5D7EEA3D048}"/>
-    <pc:docChg chg="modSld">
-      <pc:chgData name="Juena Ahmed Noshin" userId="df4442bb-949b-4849-8a28-5716394ec665" providerId="ADAL" clId="{A48BF144-6D89-4B37-BF68-F5D7EEA3D048}" dt="2024-06-22T03:01:15.650" v="3" actId="20577"/>
-      <pc:docMkLst>
-        <pc:docMk/>
-      </pc:docMkLst>
-      <pc:sldChg chg="modSp mod">
-        <pc:chgData name="Juena Ahmed Noshin" userId="df4442bb-949b-4849-8a28-5716394ec665" providerId="ADAL" clId="{A48BF144-6D89-4B37-BF68-F5D7EEA3D048}" dt="2024-06-22T03:01:15.650" v="3" actId="20577"/>
-        <pc:sldMkLst>
-          <pc:docMk/>
-          <pc:sldMk cId="0" sldId="419"/>
-        </pc:sldMkLst>
-        <pc:spChg chg="mod">
-          <ac:chgData name="Juena Ahmed Noshin" userId="df4442bb-949b-4849-8a28-5716394ec665" providerId="ADAL" clId="{A48BF144-6D89-4B37-BF68-F5D7EEA3D048}" dt="2024-06-22T03:01:15.650" v="3" actId="20577"/>
-          <ac:spMkLst>
-            <pc:docMk/>
-            <pc:sldMk cId="0" sldId="419"/>
-            <ac:spMk id="5" creationId="{00000000-0000-0000-0000-000000000000}"/>
-          </ac:spMkLst>
-        </pc:spChg>
-      </pc:sldChg>
-    </pc:docChg>
-  </pc:docChgLst>
-  <pc:docChgLst>
     <pc:chgData name="Juena Ahmed Noshin" userId="df4442bb-949b-4849-8a28-5716394ec665" providerId="ADAL" clId="{A935AC6B-9367-4958-A113-C03B9DAD871F}"/>
     <pc:docChg chg="addSld delSld modSld">
       <pc:chgData name="Juena Ahmed Noshin" userId="df4442bb-949b-4849-8a28-5716394ec665" providerId="ADAL" clId="{A935AC6B-9367-4958-A113-C03B9DAD871F}" dt="2023-04-11T05:08:32.366" v="2" actId="2696"/>
@@ -250,6 +226,30 @@
           <pc:docMk/>
           <pc:sldMk cId="2629541082" sldId="480"/>
         </pc:sldMkLst>
+      </pc:sldChg>
+    </pc:docChg>
+  </pc:docChgLst>
+  <pc:docChgLst>
+    <pc:chgData name="Juena Ahmed Noshin" userId="df4442bb-949b-4849-8a28-5716394ec665" providerId="ADAL" clId="{A48BF144-6D89-4B37-BF68-F5D7EEA3D048}"/>
+    <pc:docChg chg="modSld">
+      <pc:chgData name="Juena Ahmed Noshin" userId="df4442bb-949b-4849-8a28-5716394ec665" providerId="ADAL" clId="{A48BF144-6D89-4B37-BF68-F5D7EEA3D048}" dt="2024-06-22T03:01:15.650" v="3" actId="20577"/>
+      <pc:docMkLst>
+        <pc:docMk/>
+      </pc:docMkLst>
+      <pc:sldChg chg="modSp mod">
+        <pc:chgData name="Juena Ahmed Noshin" userId="df4442bb-949b-4849-8a28-5716394ec665" providerId="ADAL" clId="{A48BF144-6D89-4B37-BF68-F5D7EEA3D048}" dt="2024-06-22T03:01:15.650" v="3" actId="20577"/>
+        <pc:sldMkLst>
+          <pc:docMk/>
+          <pc:sldMk cId="0" sldId="419"/>
+        </pc:sldMkLst>
+        <pc:spChg chg="mod">
+          <ac:chgData name="Juena Ahmed Noshin" userId="df4442bb-949b-4849-8a28-5716394ec665" providerId="ADAL" clId="{A48BF144-6D89-4B37-BF68-F5D7EEA3D048}" dt="2024-06-22T03:01:15.650" v="3" actId="20577"/>
+          <ac:spMkLst>
+            <pc:docMk/>
+            <pc:sldMk cId="0" sldId="419"/>
+            <ac:spMk id="5" creationId="{00000000-0000-0000-0000-000000000000}"/>
+          </ac:spMkLst>
+        </pc:spChg>
       </pc:sldChg>
     </pc:docChg>
   </pc:docChgLst>
@@ -8386,13 +8386,29 @@
           <a:p>
             <a:r>
               <a:rPr lang="en-US" sz="3200" dirty="0"/>
-              <a:t>A function is same as a procedure except that it returns a value</a:t>
+              <a:t>A function is same as a procedure except that </a:t>
+            </a:r>
+            <a:r>
+              <a:rPr lang="en-US" sz="3200" dirty="0">
+                <a:highlight>
+                  <a:srgbClr val="FFFF00"/>
+                </a:highlight>
+              </a:rPr>
+              <a:t>it returns a value</a:t>
             </a:r>
           </a:p>
           <a:p>
             <a:r>
               <a:rPr lang="en-US" sz="3200" dirty="0"/>
-              <a:t>Therefore, all the discussions of the previous lecture are true for functions too</a:t>
+              <a:t>Therefore, all the discussions of the previous lecture are true for </a:t>
+            </a:r>
+            <a:r>
+              <a:rPr lang="en-US" sz="3200" dirty="0">
+                <a:highlight>
+                  <a:srgbClr val="FFFF00"/>
+                </a:highlight>
+              </a:rPr>
+              <a:t>functions too</a:t>
             </a:r>
           </a:p>
           <a:p>
